--- a/docs/content/meeting_r/meeting_r_activity.pptx
+++ b/docs/content/meeting_r/meeting_r_activity.pptx
@@ -36,6 +36,7 @@
     <p:sldId id="284" r:id="rId30"/>
     <p:sldId id="285" r:id="rId31"/>
     <p:sldId id="286" r:id="rId32"/>
+    <p:sldId id="287" r:id="rId33"/>
   </p:sldIdLst>
   <p:sldSz cx="9144000" cy="5143500" type="screen16x9"/>
   <p:notesSz cx="6858000" cy="9144000"/>
@@ -13741,6 +13742,1027 @@
 </file>
 
 <file path=ppt/slides/slide31.xml><?xml version="1.0" encoding="utf-8"?>
+<p:sld xmlns:a="http://schemas.openxmlformats.org/drawingml/2006/main" xmlns:r="http://schemas.openxmlformats.org/officeDocument/2006/relationships" xmlns:p="http://schemas.openxmlformats.org/presentationml/2006/main">
+  <p:cSld>
+    <p:spTree>
+      <p:nvGrpSpPr>
+        <p:cNvPr id="1" name=""/>
+        <p:cNvGrpSpPr/>
+        <p:nvPr/>
+      </p:nvGrpSpPr>
+      <p:grpSpPr>
+        <a:xfrm>
+          <a:off x="0" y="0"/>
+          <a:ext cx="0" cy="0"/>
+          <a:chOff x="0" y="0"/>
+          <a:chExt cx="0" cy="0"/>
+        </a:xfrm>
+      </p:grpSpPr>
+      <p:sp>
+        <p:nvSpPr>
+          <p:cNvPr id="2" name="Title 1"/>
+          <p:cNvSpPr>
+            <a:spLocks noGrp="1"/>
+          </p:cNvSpPr>
+          <p:nvPr>
+            <p:ph type="title"/>
+          </p:nvPr>
+        </p:nvSpPr>
+        <p:spPr>
+          <a:xfrm>
+            <a:off x="0" y="0"/>
+            <a:ext cx="9144000" cy="582780"/>
+          </a:xfrm>
+        </p:spPr>
+        <p:txBody>
+          <a:bodyPr/>
+          <a:lstStyle/>
+          <a:p>
+            <a:pPr lvl="0" indent="0" marL="0">
+              <a:buNone/>
+            </a:pPr>
+            <a:r>
+              <a:rPr/>
+              <a:t>Extension — out of class (~30–40 min)</a:t>
+            </a:r>
+          </a:p>
+        </p:txBody>
+      </p:sp>
+      <p:sp>
+        <p:nvSpPr>
+          <p:cNvPr id="3" name="Content Placeholder 2"/>
+          <p:cNvSpPr>
+            <a:spLocks noGrp="1"/>
+          </p:cNvSpPr>
+          <p:nvPr>
+            <p:ph idx="1"/>
+          </p:nvPr>
+        </p:nvSpPr>
+        <p:spPr/>
+        <p:txBody>
+          <a:bodyPr/>
+          <a:lstStyle/>
+          <a:p>
+            <a:pPr lvl="0" indent="0" marL="0">
+              <a:buNone/>
+            </a:pPr>
+            <a:r>
+              <a:rPr i="1"/>
+              <a:t>Turn this in with your worksheet. In class we split leaves at an arbitrary weight. Now you split them at a number </a:t>
+            </a:r>
+            <a:r>
+              <a:rPr b="1" i="1"/>
+              <a:t>you compute</a:t>
+            </a:r>
+            <a:r>
+              <a:rPr i="1"/>
+              <a:t>, and reason about why that changes the picture.</a:t>
+            </a:r>
+          </a:p>
+          <a:p>
+            <a:pPr lvl="0" indent="0" marL="1270000">
+              <a:buNone/>
+            </a:pPr>
+            <a:r>
+              <a:rPr sz="2000" b="1"/>
+              <a:t>Important</a:t>
+            </a:r>
+          </a:p>
+          <a:p>
+            <a:pPr lvl="0" indent="0" marL="1270000">
+              <a:buNone/>
+            </a:pPr>
+            <a:r>
+              <a:rPr sz="2000" b="1"/>
+              <a:t>E2 and E3 must be handwritten</a:t>
+            </a:r>
+            <a:r>
+              <a:rPr sz="2000"/>
+              <a:t> on paper, photographed, and embedded (</a:t>
+            </a:r>
+            <a:r>
+              <a:rPr sz="2000">
+                <a:latin typeface="Courier"/>
+              </a:rPr>
+              <a:t>![caption](my_photo.jpg)</a:t>
+            </a:r>
+            <a:r>
+              <a:rPr sz="2000"/>
+              <a:t>). Typed answers to E2/E3 get </a:t>
+            </a:r>
+            <a:r>
+              <a:rPr sz="2000" b="1"/>
+              <a:t>at most half credit, even if correct</a:t>
+            </a:r>
+            <a:r>
+              <a:rPr sz="2000"/>
+              <a:t> — I want your own sketch and your own reasoning about </a:t>
+            </a:r>
+            <a:r>
+              <a:rPr sz="2000" i="1"/>
+              <a:t>your own</a:t>
+            </a:r>
+            <a:r>
+              <a:rPr sz="2000"/>
+              <a:t> number.</a:t>
+            </a:r>
+          </a:p>
+          <a:p>
+            <a:pPr lvl="0" indent="0" marL="0">
+              <a:spcBef>
+                <a:spcPts val="3000"/>
+              </a:spcBef>
+              <a:buNone/>
+            </a:pPr>
+            <a:r>
+              <a:rPr b="1"/>
+              <a:t>E1 · Your own size cutoff (3 pts)</a:t>
+            </a:r>
+          </a:p>
+          <a:p>
+            <a:pPr lvl="0" indent="0">
+              <a:buNone/>
+            </a:pPr>
+            <a:r>
+              <a:rPr>
+                <a:solidFill>
+                  <a:srgbClr val="5E5E5E"/>
+                </a:solidFill>
+                <a:latin typeface="Courier"/>
+              </a:rPr>
+              <a:t># 1. Compute the real mean leaf weight (don't eyeball it)</a:t>
+            </a:r>
+            <a:br/>
+            <a:r>
+              <a:rPr>
+                <a:solidFill>
+                  <a:srgbClr val="003B4F"/>
+                </a:solidFill>
+                <a:latin typeface="Courier"/>
+              </a:rPr>
+              <a:t>cutoff &lt;- </a:t>
+            </a:r>
+            <a:r>
+              <a:rPr>
+                <a:solidFill>
+                  <a:srgbClr val="4758AB"/>
+                </a:solidFill>
+                <a:latin typeface="Courier"/>
+              </a:rPr>
+              <a:t>mean</a:t>
+            </a:r>
+            <a:r>
+              <a:rPr>
+                <a:solidFill>
+                  <a:srgbClr val="003B4F"/>
+                </a:solidFill>
+                <a:latin typeface="Courier"/>
+              </a:rPr>
+              <a:t>(tree_df</a:t>
+            </a:r>
+            <a:r>
+              <a:rPr>
+                <a:solidFill>
+                  <a:srgbClr val="5E5E5E"/>
+                </a:solidFill>
+                <a:latin typeface="Courier"/>
+              </a:rPr>
+              <a:t>$</a:t>
+            </a:r>
+            <a:r>
+              <a:rPr>
+                <a:solidFill>
+                  <a:srgbClr val="003B4F"/>
+                </a:solidFill>
+                <a:latin typeface="Courier"/>
+              </a:rPr>
+              <a:t>weight_g, </a:t>
+            </a:r>
+            <a:r>
+              <a:rPr>
+                <a:solidFill>
+                  <a:srgbClr val="657422"/>
+                </a:solidFill>
+                <a:latin typeface="Courier"/>
+              </a:rPr>
+              <a:t>na.rm =</a:t>
+            </a:r>
+            <a:r>
+              <a:rPr>
+                <a:solidFill>
+                  <a:srgbClr val="003B4F"/>
+                </a:solidFill>
+                <a:latin typeface="Courier"/>
+              </a:rPr>
+              <a:t> </a:t>
+            </a:r>
+            <a:r>
+              <a:rPr>
+                <a:solidFill>
+                  <a:srgbClr val="8F5902"/>
+                </a:solidFill>
+                <a:latin typeface="Courier"/>
+              </a:rPr>
+              <a:t>TRUE</a:t>
+            </a:r>
+            <a:r>
+              <a:rPr>
+                <a:solidFill>
+                  <a:srgbClr val="003B4F"/>
+                </a:solidFill>
+                <a:latin typeface="Courier"/>
+              </a:rPr>
+              <a:t>)</a:t>
+            </a:r>
+            <a:br/>
+            <a:r>
+              <a:rPr>
+                <a:solidFill>
+                  <a:srgbClr val="003B4F"/>
+                </a:solidFill>
+                <a:latin typeface="Courier"/>
+              </a:rPr>
+              <a:t>cutoff</a:t>
+            </a:r>
+            <a:br/>
+            <a:br/>
+            <a:r>
+              <a:rPr>
+                <a:solidFill>
+                  <a:srgbClr val="5E5E5E"/>
+                </a:solidFill>
+                <a:latin typeface="Courier"/>
+              </a:rPr>
+              <a:t># 2. Use YOUR cutoff to make a size class, then facet the boxplot</a:t>
+            </a:r>
+            <a:br/>
+            <a:r>
+              <a:rPr>
+                <a:solidFill>
+                  <a:srgbClr val="003B4F"/>
+                </a:solidFill>
+                <a:latin typeface="Courier"/>
+              </a:rPr>
+              <a:t>tree_df </a:t>
+            </a:r>
+            <a:r>
+              <a:rPr>
+                <a:solidFill>
+                  <a:srgbClr val="5E5E5E"/>
+                </a:solidFill>
+                <a:latin typeface="Courier"/>
+              </a:rPr>
+              <a:t>%&gt;%</a:t>
+            </a:r>
+            <a:br/>
+            <a:r>
+              <a:rPr>
+                <a:solidFill>
+                  <a:srgbClr val="003B4F"/>
+                </a:solidFill>
+                <a:latin typeface="Courier"/>
+              </a:rPr>
+              <a:t>  </a:t>
+            </a:r>
+            <a:r>
+              <a:rPr>
+                <a:solidFill>
+                  <a:srgbClr val="4758AB"/>
+                </a:solidFill>
+                <a:latin typeface="Courier"/>
+              </a:rPr>
+              <a:t>mutate</a:t>
+            </a:r>
+            <a:r>
+              <a:rPr>
+                <a:solidFill>
+                  <a:srgbClr val="003B4F"/>
+                </a:solidFill>
+                <a:latin typeface="Courier"/>
+              </a:rPr>
+              <a:t>(</a:t>
+            </a:r>
+            <a:r>
+              <a:rPr>
+                <a:solidFill>
+                  <a:srgbClr val="657422"/>
+                </a:solidFill>
+                <a:latin typeface="Courier"/>
+              </a:rPr>
+              <a:t>size_class =</a:t>
+            </a:r>
+            <a:r>
+              <a:rPr>
+                <a:solidFill>
+                  <a:srgbClr val="003B4F"/>
+                </a:solidFill>
+                <a:latin typeface="Courier"/>
+              </a:rPr>
+              <a:t> </a:t>
+            </a:r>
+            <a:r>
+              <a:rPr>
+                <a:solidFill>
+                  <a:srgbClr val="4758AB"/>
+                </a:solidFill>
+                <a:latin typeface="Courier"/>
+              </a:rPr>
+              <a:t>if_else</a:t>
+            </a:r>
+            <a:r>
+              <a:rPr>
+                <a:solidFill>
+                  <a:srgbClr val="003B4F"/>
+                </a:solidFill>
+                <a:latin typeface="Courier"/>
+              </a:rPr>
+              <a:t>(weight_g </a:t>
+            </a:r>
+            <a:r>
+              <a:rPr>
+                <a:solidFill>
+                  <a:srgbClr val="5E5E5E"/>
+                </a:solidFill>
+                <a:latin typeface="Courier"/>
+              </a:rPr>
+              <a:t>&gt;</a:t>
+            </a:r>
+            <a:r>
+              <a:rPr>
+                <a:solidFill>
+                  <a:srgbClr val="003B4F"/>
+                </a:solidFill>
+                <a:latin typeface="Courier"/>
+              </a:rPr>
+              <a:t> cutoff, </a:t>
+            </a:r>
+            <a:r>
+              <a:rPr>
+                <a:solidFill>
+                  <a:srgbClr val="20794D"/>
+                </a:solidFill>
+                <a:latin typeface="Courier"/>
+              </a:rPr>
+              <a:t>"large"</a:t>
+            </a:r>
+            <a:r>
+              <a:rPr>
+                <a:solidFill>
+                  <a:srgbClr val="003B4F"/>
+                </a:solidFill>
+                <a:latin typeface="Courier"/>
+              </a:rPr>
+              <a:t>, </a:t>
+            </a:r>
+            <a:r>
+              <a:rPr>
+                <a:solidFill>
+                  <a:srgbClr val="20794D"/>
+                </a:solidFill>
+                <a:latin typeface="Courier"/>
+              </a:rPr>
+              <a:t>"small"</a:t>
+            </a:r>
+            <a:r>
+              <a:rPr>
+                <a:solidFill>
+                  <a:srgbClr val="003B4F"/>
+                </a:solidFill>
+                <a:latin typeface="Courier"/>
+              </a:rPr>
+              <a:t>)) </a:t>
+            </a:r>
+            <a:r>
+              <a:rPr>
+                <a:solidFill>
+                  <a:srgbClr val="5E5E5E"/>
+                </a:solidFill>
+                <a:latin typeface="Courier"/>
+              </a:rPr>
+              <a:t>%&gt;%</a:t>
+            </a:r>
+            <a:br/>
+            <a:r>
+              <a:rPr>
+                <a:solidFill>
+                  <a:srgbClr val="003B4F"/>
+                </a:solidFill>
+                <a:latin typeface="Courier"/>
+              </a:rPr>
+              <a:t>  </a:t>
+            </a:r>
+            <a:r>
+              <a:rPr>
+                <a:solidFill>
+                  <a:srgbClr val="4758AB"/>
+                </a:solidFill>
+                <a:latin typeface="Courier"/>
+              </a:rPr>
+              <a:t>ggplot</a:t>
+            </a:r>
+            <a:r>
+              <a:rPr>
+                <a:solidFill>
+                  <a:srgbClr val="003B4F"/>
+                </a:solidFill>
+                <a:latin typeface="Courier"/>
+              </a:rPr>
+              <a:t>(</a:t>
+            </a:r>
+            <a:r>
+              <a:rPr>
+                <a:solidFill>
+                  <a:srgbClr val="4758AB"/>
+                </a:solidFill>
+                <a:latin typeface="Courier"/>
+              </a:rPr>
+              <a:t>aes</a:t>
+            </a:r>
+            <a:r>
+              <a:rPr>
+                <a:solidFill>
+                  <a:srgbClr val="003B4F"/>
+                </a:solidFill>
+                <a:latin typeface="Courier"/>
+              </a:rPr>
+              <a:t>(</a:t>
+            </a:r>
+            <a:r>
+              <a:rPr>
+                <a:solidFill>
+                  <a:srgbClr val="657422"/>
+                </a:solidFill>
+                <a:latin typeface="Courier"/>
+              </a:rPr>
+              <a:t>x =</a:t>
+            </a:r>
+            <a:r>
+              <a:rPr>
+                <a:solidFill>
+                  <a:srgbClr val="003B4F"/>
+                </a:solidFill>
+                <a:latin typeface="Courier"/>
+              </a:rPr>
+              <a:t> side, </a:t>
+            </a:r>
+            <a:r>
+              <a:rPr>
+                <a:solidFill>
+                  <a:srgbClr val="657422"/>
+                </a:solidFill>
+                <a:latin typeface="Courier"/>
+              </a:rPr>
+              <a:t>y =</a:t>
+            </a:r>
+            <a:r>
+              <a:rPr>
+                <a:solidFill>
+                  <a:srgbClr val="003B4F"/>
+                </a:solidFill>
+                <a:latin typeface="Courier"/>
+              </a:rPr>
+              <a:t> weight_g, </a:t>
+            </a:r>
+            <a:r>
+              <a:rPr>
+                <a:solidFill>
+                  <a:srgbClr val="657422"/>
+                </a:solidFill>
+                <a:latin typeface="Courier"/>
+              </a:rPr>
+              <a:t>fill =</a:t>
+            </a:r>
+            <a:r>
+              <a:rPr>
+                <a:solidFill>
+                  <a:srgbClr val="003B4F"/>
+                </a:solidFill>
+                <a:latin typeface="Courier"/>
+              </a:rPr>
+              <a:t> side)) </a:t>
+            </a:r>
+            <a:r>
+              <a:rPr>
+                <a:solidFill>
+                  <a:srgbClr val="5E5E5E"/>
+                </a:solidFill>
+                <a:latin typeface="Courier"/>
+              </a:rPr>
+              <a:t>+</a:t>
+            </a:r>
+            <a:br/>
+            <a:r>
+              <a:rPr>
+                <a:solidFill>
+                  <a:srgbClr val="003B4F"/>
+                </a:solidFill>
+                <a:latin typeface="Courier"/>
+              </a:rPr>
+              <a:t>  </a:t>
+            </a:r>
+            <a:r>
+              <a:rPr>
+                <a:solidFill>
+                  <a:srgbClr val="4758AB"/>
+                </a:solidFill>
+                <a:latin typeface="Courier"/>
+              </a:rPr>
+              <a:t>geom_boxplot</a:t>
+            </a:r>
+            <a:r>
+              <a:rPr>
+                <a:solidFill>
+                  <a:srgbClr val="003B4F"/>
+                </a:solidFill>
+                <a:latin typeface="Courier"/>
+              </a:rPr>
+              <a:t>(</a:t>
+            </a:r>
+            <a:r>
+              <a:rPr>
+                <a:solidFill>
+                  <a:srgbClr val="657422"/>
+                </a:solidFill>
+                <a:latin typeface="Courier"/>
+              </a:rPr>
+              <a:t>alpha =</a:t>
+            </a:r>
+            <a:r>
+              <a:rPr>
+                <a:solidFill>
+                  <a:srgbClr val="003B4F"/>
+                </a:solidFill>
+                <a:latin typeface="Courier"/>
+              </a:rPr>
+              <a:t> </a:t>
+            </a:r>
+            <a:r>
+              <a:rPr>
+                <a:solidFill>
+                  <a:srgbClr val="AD0000"/>
+                </a:solidFill>
+                <a:latin typeface="Courier"/>
+              </a:rPr>
+              <a:t>0.5</a:t>
+            </a:r>
+            <a:r>
+              <a:rPr>
+                <a:solidFill>
+                  <a:srgbClr val="003B4F"/>
+                </a:solidFill>
+                <a:latin typeface="Courier"/>
+              </a:rPr>
+              <a:t>, </a:t>
+            </a:r>
+            <a:r>
+              <a:rPr>
+                <a:solidFill>
+                  <a:srgbClr val="657422"/>
+                </a:solidFill>
+                <a:latin typeface="Courier"/>
+              </a:rPr>
+              <a:t>outlier.shape =</a:t>
+            </a:r>
+            <a:r>
+              <a:rPr>
+                <a:solidFill>
+                  <a:srgbClr val="003B4F"/>
+                </a:solidFill>
+                <a:latin typeface="Courier"/>
+              </a:rPr>
+              <a:t> </a:t>
+            </a:r>
+            <a:r>
+              <a:rPr>
+                <a:solidFill>
+                  <a:srgbClr val="8F5902"/>
+                </a:solidFill>
+                <a:latin typeface="Courier"/>
+              </a:rPr>
+              <a:t>NA</a:t>
+            </a:r>
+            <a:r>
+              <a:rPr>
+                <a:solidFill>
+                  <a:srgbClr val="003B4F"/>
+                </a:solidFill>
+                <a:latin typeface="Courier"/>
+              </a:rPr>
+              <a:t>) </a:t>
+            </a:r>
+            <a:r>
+              <a:rPr>
+                <a:solidFill>
+                  <a:srgbClr val="5E5E5E"/>
+                </a:solidFill>
+                <a:latin typeface="Courier"/>
+              </a:rPr>
+              <a:t>+</a:t>
+            </a:r>
+            <a:br/>
+            <a:r>
+              <a:rPr>
+                <a:solidFill>
+                  <a:srgbClr val="003B4F"/>
+                </a:solidFill>
+                <a:latin typeface="Courier"/>
+              </a:rPr>
+              <a:t>  </a:t>
+            </a:r>
+            <a:r>
+              <a:rPr>
+                <a:solidFill>
+                  <a:srgbClr val="4758AB"/>
+                </a:solidFill>
+                <a:latin typeface="Courier"/>
+              </a:rPr>
+              <a:t>geom_point</a:t>
+            </a:r>
+            <a:r>
+              <a:rPr>
+                <a:solidFill>
+                  <a:srgbClr val="003B4F"/>
+                </a:solidFill>
+                <a:latin typeface="Courier"/>
+              </a:rPr>
+              <a:t>(</a:t>
+            </a:r>
+            <a:r>
+              <a:rPr>
+                <a:solidFill>
+                  <a:srgbClr val="657422"/>
+                </a:solidFill>
+                <a:latin typeface="Courier"/>
+              </a:rPr>
+              <a:t>position =</a:t>
+            </a:r>
+            <a:r>
+              <a:rPr>
+                <a:solidFill>
+                  <a:srgbClr val="003B4F"/>
+                </a:solidFill>
+                <a:latin typeface="Courier"/>
+              </a:rPr>
+              <a:t> </a:t>
+            </a:r>
+            <a:r>
+              <a:rPr>
+                <a:solidFill>
+                  <a:srgbClr val="4758AB"/>
+                </a:solidFill>
+                <a:latin typeface="Courier"/>
+              </a:rPr>
+              <a:t>position_jitter</a:t>
+            </a:r>
+            <a:r>
+              <a:rPr>
+                <a:solidFill>
+                  <a:srgbClr val="003B4F"/>
+                </a:solidFill>
+                <a:latin typeface="Courier"/>
+              </a:rPr>
+              <a:t>(</a:t>
+            </a:r>
+            <a:r>
+              <a:rPr>
+                <a:solidFill>
+                  <a:srgbClr val="657422"/>
+                </a:solidFill>
+                <a:latin typeface="Courier"/>
+              </a:rPr>
+              <a:t>width =</a:t>
+            </a:r>
+            <a:r>
+              <a:rPr>
+                <a:solidFill>
+                  <a:srgbClr val="003B4F"/>
+                </a:solidFill>
+                <a:latin typeface="Courier"/>
+              </a:rPr>
+              <a:t> </a:t>
+            </a:r>
+            <a:r>
+              <a:rPr>
+                <a:solidFill>
+                  <a:srgbClr val="AD0000"/>
+                </a:solidFill>
+                <a:latin typeface="Courier"/>
+              </a:rPr>
+              <a:t>0.15</a:t>
+            </a:r>
+            <a:r>
+              <a:rPr>
+                <a:solidFill>
+                  <a:srgbClr val="003B4F"/>
+                </a:solidFill>
+                <a:latin typeface="Courier"/>
+              </a:rPr>
+              <a:t>, </a:t>
+            </a:r>
+            <a:r>
+              <a:rPr>
+                <a:solidFill>
+                  <a:srgbClr val="657422"/>
+                </a:solidFill>
+                <a:latin typeface="Courier"/>
+              </a:rPr>
+              <a:t>seed =</a:t>
+            </a:r>
+            <a:r>
+              <a:rPr>
+                <a:solidFill>
+                  <a:srgbClr val="003B4F"/>
+                </a:solidFill>
+                <a:latin typeface="Courier"/>
+              </a:rPr>
+              <a:t> </a:t>
+            </a:r>
+            <a:r>
+              <a:rPr>
+                <a:solidFill>
+                  <a:srgbClr val="AD0000"/>
+                </a:solidFill>
+                <a:latin typeface="Courier"/>
+              </a:rPr>
+              <a:t>42</a:t>
+            </a:r>
+            <a:r>
+              <a:rPr>
+                <a:solidFill>
+                  <a:srgbClr val="003B4F"/>
+                </a:solidFill>
+                <a:latin typeface="Courier"/>
+              </a:rPr>
+              <a:t>),</a:t>
+            </a:r>
+            <a:br/>
+            <a:r>
+              <a:rPr>
+                <a:solidFill>
+                  <a:srgbClr val="003B4F"/>
+                </a:solidFill>
+                <a:latin typeface="Courier"/>
+              </a:rPr>
+              <a:t>             </a:t>
+            </a:r>
+            <a:r>
+              <a:rPr>
+                <a:solidFill>
+                  <a:srgbClr val="657422"/>
+                </a:solidFill>
+                <a:latin typeface="Courier"/>
+              </a:rPr>
+              <a:t>alpha =</a:t>
+            </a:r>
+            <a:r>
+              <a:rPr>
+                <a:solidFill>
+                  <a:srgbClr val="003B4F"/>
+                </a:solidFill>
+                <a:latin typeface="Courier"/>
+              </a:rPr>
+              <a:t> </a:t>
+            </a:r>
+            <a:r>
+              <a:rPr>
+                <a:solidFill>
+                  <a:srgbClr val="AD0000"/>
+                </a:solidFill>
+                <a:latin typeface="Courier"/>
+              </a:rPr>
+              <a:t>0.5</a:t>
+            </a:r>
+            <a:r>
+              <a:rPr>
+                <a:solidFill>
+                  <a:srgbClr val="003B4F"/>
+                </a:solidFill>
+                <a:latin typeface="Courier"/>
+              </a:rPr>
+              <a:t>) </a:t>
+            </a:r>
+            <a:r>
+              <a:rPr>
+                <a:solidFill>
+                  <a:srgbClr val="5E5E5E"/>
+                </a:solidFill>
+                <a:latin typeface="Courier"/>
+              </a:rPr>
+              <a:t>+</a:t>
+            </a:r>
+            <a:br/>
+            <a:r>
+              <a:rPr>
+                <a:solidFill>
+                  <a:srgbClr val="003B4F"/>
+                </a:solidFill>
+                <a:latin typeface="Courier"/>
+              </a:rPr>
+              <a:t>  </a:t>
+            </a:r>
+            <a:r>
+              <a:rPr>
+                <a:solidFill>
+                  <a:srgbClr val="4758AB"/>
+                </a:solidFill>
+                <a:latin typeface="Courier"/>
+              </a:rPr>
+              <a:t>facet_wrap</a:t>
+            </a:r>
+            <a:r>
+              <a:rPr>
+                <a:solidFill>
+                  <a:srgbClr val="003B4F"/>
+                </a:solidFill>
+                <a:latin typeface="Courier"/>
+              </a:rPr>
+              <a:t>(</a:t>
+            </a:r>
+            <a:r>
+              <a:rPr>
+                <a:solidFill>
+                  <a:srgbClr val="5E5E5E"/>
+                </a:solidFill>
+                <a:latin typeface="Courier"/>
+              </a:rPr>
+              <a:t>~</a:t>
+            </a:r>
+            <a:r>
+              <a:rPr>
+                <a:solidFill>
+                  <a:srgbClr val="003B4F"/>
+                </a:solidFill>
+                <a:latin typeface="Courier"/>
+              </a:rPr>
+              <a:t> size_class) </a:t>
+            </a:r>
+            <a:r>
+              <a:rPr>
+                <a:solidFill>
+                  <a:srgbClr val="5E5E5E"/>
+                </a:solidFill>
+                <a:latin typeface="Courier"/>
+              </a:rPr>
+              <a:t>+</a:t>
+            </a:r>
+            <a:br/>
+            <a:r>
+              <a:rPr>
+                <a:solidFill>
+                  <a:srgbClr val="003B4F"/>
+                </a:solidFill>
+                <a:latin typeface="Courier"/>
+              </a:rPr>
+              <a:t>  </a:t>
+            </a:r>
+            <a:r>
+              <a:rPr>
+                <a:solidFill>
+                  <a:srgbClr val="4758AB"/>
+                </a:solidFill>
+                <a:latin typeface="Courier"/>
+              </a:rPr>
+              <a:t>theme_minimal</a:t>
+            </a:r>
+            <a:r>
+              <a:rPr>
+                <a:solidFill>
+                  <a:srgbClr val="003B4F"/>
+                </a:solidFill>
+                <a:latin typeface="Courier"/>
+              </a:rPr>
+              <a:t>()</a:t>
+            </a:r>
+          </a:p>
+          <a:p>
+            <a:pPr lvl="0" indent="0" marL="0">
+              <a:buNone/>
+            </a:pPr>
+            <a:r>
+              <a:rPr/>
+              <a:t>Save the figure to </a:t>
+            </a:r>
+            <a:r>
+              <a:rPr>
+                <a:latin typeface="Courier"/>
+              </a:rPr>
+              <a:t>figures/</a:t>
+            </a:r>
+            <a:r>
+              <a:rPr/>
+              <a:t> at </a:t>
+            </a:r>
+            <a:r>
+              <a:rPr>
+                <a:latin typeface="Courier"/>
+              </a:rPr>
+              <a:t>dpi = 300</a:t>
+            </a:r>
+            <a:r>
+              <a:rPr/>
+              <a:t>. Record your exact </a:t>
+            </a:r>
+            <a:r>
+              <a:rPr>
+                <a:latin typeface="Courier"/>
+              </a:rPr>
+              <a:t>cutoff</a:t>
+            </a:r>
+            <a:r>
+              <a:rPr/>
+              <a:t>.</a:t>
+            </a:r>
+          </a:p>
+          <a:p>
+            <a:pPr lvl="0" indent="0" marL="0">
+              <a:spcBef>
+                <a:spcPts val="3000"/>
+              </a:spcBef>
+              <a:buNone/>
+            </a:pPr>
+            <a:r>
+              <a:rPr b="1"/>
+              <a:t>E2 · Predict, then check — ✍️ by hand (2 pts)</a:t>
+            </a:r>
+          </a:p>
+          <a:p>
+            <a:pPr lvl="0" indent="0" marL="0">
+              <a:buNone/>
+            </a:pPr>
+            <a:r>
+              <a:rPr b="1"/>
+              <a:t>Before running E1:</a:t>
+            </a:r>
+            <a:r>
+              <a:rPr/>
+              <a:t> sketch the faceted plot using your mean as the cutoff. Will the “large” and “small” panels hold roughly equal numbers of points, or not? Guess and say why. Then run it and write whether you were right, and why cutting at the mean behaves differently from cutting at a round number like 5.</a:t>
+            </a:r>
+          </a:p>
+          <a:p>
+            <a:pPr lvl="0" indent="0" marL="0">
+              <a:spcBef>
+                <a:spcPts val="3000"/>
+              </a:spcBef>
+              <a:buNone/>
+            </a:pPr>
+            <a:r>
+              <a:rPr b="1"/>
+              <a:t>E3 · Interpret — ✍️ by hand, in your own words (2 pts)</a:t>
+            </a:r>
+          </a:p>
+          <a:p>
+            <a:pPr lvl="0" indent="-342900" marL="342900">
+              <a:buAutoNum type="arabicPeriod"/>
+            </a:pPr>
+            <a:r>
+              <a:rPr/>
+              <a:t>State the exact mean </a:t>
+            </a:r>
+            <a:r>
+              <a:rPr>
+                <a:latin typeface="Courier"/>
+              </a:rPr>
+              <a:t>weight_g</a:t>
+            </a:r>
+            <a:r>
+              <a:rPr/>
+              <a:t> you computed.</a:t>
+            </a:r>
+          </a:p>
+          <a:p>
+            <a:pPr lvl="0" indent="-342900" marL="342900">
+              <a:buAutoNum type="arabicPeriod"/>
+            </a:pPr>
+            <a:r>
+              <a:rPr/>
+              <a:t>From your plots: does one side of the tree seem to have heavier leaves? Explain as if to a friend who’s never seen a boxplot — describe the shapes, not the stats vocabulary.</a:t>
+            </a:r>
+          </a:p>
+          <a:p>
+            <a:pPr lvl="0" indent="-342900" marL="342900">
+              <a:buAutoNum type="arabicPeriod"/>
+            </a:pPr>
+            <a:r>
+              <a:rPr/>
+              <a:t>What would you want to test </a:t>
+            </a:r>
+            <a:r>
+              <a:rPr i="1"/>
+              <a:t>formally</a:t>
+            </a:r>
+            <a:r>
+              <a:rPr/>
+              <a:t> next, and why isn’t eyeballing the boxplot enough on its own?</a:t>
+            </a:r>
+          </a:p>
+        </p:txBody>
+      </p:sp>
+    </p:spTree>
+  </p:cSld>
+</p:sld>
+</file>
+
+<file path=ppt/slides/slide32.xml><?xml version="1.0" encoding="utf-8"?>
 <p:sld xmlns:a="http://schemas.openxmlformats.org/drawingml/2006/main" xmlns:r="http://schemas.openxmlformats.org/officeDocument/2006/relationships" xmlns:p="http://schemas.openxmlformats.org/presentationml/2006/main">
   <p:cSld>
     <p:spTree>
